--- a/the_reading_room_presentation.pptx
+++ b/the_reading_room_presentation.pptx
@@ -6390,21 +6390,146 @@
           <a:bodyPr wrap="square" lIns="0" tIns="0" rIns="0" bIns="0" rtlCol="0" anchor="ctr"/>
           <a:lstStyle/>
           <a:p>
-            <a:pPr marL="0" indent="0">
-              <a:buNone/>
-            </a:pPr>
-            <a:r>
-              <a:rPr lang="en-US" sz="1300" i="1">
-                <a:solidFill>
-                  <a:srgbClr val="B5D4F4"/>
-                </a:solidFill>
-                <a:latin typeface="Calibri" pitchFamily="34" charset="0"/>
-                <a:ea typeface="Calibri" pitchFamily="34" charset="-122"/>
-                <a:cs typeface="Calibri" pitchFamily="34" charset="-120"/>
-              </a:rPr>
-              <a:t>Surprise recommendation by Genre</a:t>
-            </a:r>
-            <a:endParaRPr lang="en-US" sz="1300" dirty="0"/>
+            <a:r>
+              <a:rPr lang="pt-BR" sz="1300" i="1" dirty="0" err="1">
+                <a:solidFill>
+                  <a:srgbClr val="B5D4F4"/>
+                </a:solidFill>
+                <a:latin typeface="Calibri" pitchFamily="34" charset="0"/>
+                <a:ea typeface="Calibri" pitchFamily="34" charset="-122"/>
+                <a:cs typeface="Calibri" pitchFamily="34" charset="-120"/>
+              </a:rPr>
+              <a:t>Smart</a:t>
+            </a:r>
+            <a:r>
+              <a:rPr lang="pt-BR" sz="1300" i="1" dirty="0">
+                <a:solidFill>
+                  <a:srgbClr val="B5D4F4"/>
+                </a:solidFill>
+                <a:latin typeface="Calibri" pitchFamily="34" charset="0"/>
+                <a:ea typeface="Calibri" pitchFamily="34" charset="-122"/>
+                <a:cs typeface="Calibri" pitchFamily="34" charset="-120"/>
+              </a:rPr>
+              <a:t> Book Search: </a:t>
+            </a:r>
+            <a:r>
+              <a:rPr lang="pt-BR" sz="1300" i="1" dirty="0" err="1">
+                <a:solidFill>
+                  <a:srgbClr val="B5D4F4"/>
+                </a:solidFill>
+                <a:latin typeface="Calibri" pitchFamily="34" charset="0"/>
+                <a:ea typeface="Calibri" pitchFamily="34" charset="-122"/>
+                <a:cs typeface="Calibri" pitchFamily="34" charset="-120"/>
+              </a:rPr>
+              <a:t>search</a:t>
+            </a:r>
+            <a:r>
+              <a:rPr lang="pt-BR" sz="1300" i="1" dirty="0">
+                <a:solidFill>
+                  <a:srgbClr val="B5D4F4"/>
+                </a:solidFill>
+                <a:latin typeface="Calibri" pitchFamily="34" charset="0"/>
+                <a:ea typeface="Calibri" pitchFamily="34" charset="-122"/>
+                <a:cs typeface="Calibri" pitchFamily="34" charset="-120"/>
+              </a:rPr>
+              <a:t> </a:t>
+            </a:r>
+            <a:r>
+              <a:rPr lang="pt-BR" sz="1300" i="1" dirty="0" err="1">
+                <a:solidFill>
+                  <a:srgbClr val="B5D4F4"/>
+                </a:solidFill>
+                <a:latin typeface="Calibri" pitchFamily="34" charset="0"/>
+                <a:ea typeface="Calibri" pitchFamily="34" charset="-122"/>
+                <a:cs typeface="Calibri" pitchFamily="34" charset="-120"/>
+              </a:rPr>
+              <a:t>from</a:t>
+            </a:r>
+            <a:r>
+              <a:rPr lang="pt-BR" sz="1300" i="1" dirty="0">
+                <a:solidFill>
+                  <a:srgbClr val="B5D4F4"/>
+                </a:solidFill>
+                <a:latin typeface="Calibri" pitchFamily="34" charset="0"/>
+                <a:ea typeface="Calibri" pitchFamily="34" charset="-122"/>
+                <a:cs typeface="Calibri" pitchFamily="34" charset="-120"/>
+              </a:rPr>
+              <a:t> 2,004 books </a:t>
+            </a:r>
+            <a:r>
+              <a:rPr lang="pt-BR" sz="1300" i="1" dirty="0" err="1">
+                <a:solidFill>
+                  <a:srgbClr val="B5D4F4"/>
+                </a:solidFill>
+                <a:latin typeface="Calibri" pitchFamily="34" charset="0"/>
+                <a:ea typeface="Calibri" pitchFamily="34" charset="-122"/>
+                <a:cs typeface="Calibri" pitchFamily="34" charset="-120"/>
+              </a:rPr>
+              <a:t>across</a:t>
+            </a:r>
+            <a:r>
+              <a:rPr lang="pt-BR" sz="1300" i="1" dirty="0">
+                <a:solidFill>
+                  <a:srgbClr val="B5D4F4"/>
+                </a:solidFill>
+                <a:latin typeface="Calibri" pitchFamily="34" charset="0"/>
+                <a:ea typeface="Calibri" pitchFamily="34" charset="-122"/>
+                <a:cs typeface="Calibri" pitchFamily="34" charset="-120"/>
+              </a:rPr>
+              <a:t> </a:t>
+            </a:r>
+            <a:r>
+              <a:rPr lang="pt-BR" sz="1300" i="1" dirty="0" err="1">
+                <a:solidFill>
+                  <a:srgbClr val="B5D4F4"/>
+                </a:solidFill>
+                <a:latin typeface="Calibri" pitchFamily="34" charset="0"/>
+                <a:ea typeface="Calibri" pitchFamily="34" charset="-122"/>
+                <a:cs typeface="Calibri" pitchFamily="34" charset="-120"/>
+              </a:rPr>
+              <a:t>GoodReads</a:t>
+            </a:r>
+            <a:r>
+              <a:rPr lang="pt-BR" sz="1300" i="1" dirty="0">
+                <a:solidFill>
+                  <a:srgbClr val="B5D4F4"/>
+                </a:solidFill>
+                <a:latin typeface="Calibri" pitchFamily="34" charset="0"/>
+                <a:ea typeface="Calibri" pitchFamily="34" charset="-122"/>
+                <a:cs typeface="Calibri" pitchFamily="34" charset="-120"/>
+              </a:rPr>
+              <a:t> </a:t>
+            </a:r>
+            <a:r>
+              <a:rPr lang="pt-BR" sz="1300" i="1" dirty="0" err="1">
+                <a:solidFill>
+                  <a:srgbClr val="B5D4F4"/>
+                </a:solidFill>
+                <a:latin typeface="Calibri" pitchFamily="34" charset="0"/>
+                <a:ea typeface="Calibri" pitchFamily="34" charset="-122"/>
+                <a:cs typeface="Calibri" pitchFamily="34" charset="-120"/>
+              </a:rPr>
+              <a:t>and</a:t>
+            </a:r>
+            <a:r>
+              <a:rPr lang="pt-BR" sz="1300" i="1" dirty="0">
+                <a:solidFill>
+                  <a:srgbClr val="B5D4F4"/>
+                </a:solidFill>
+                <a:latin typeface="Calibri" pitchFamily="34" charset="0"/>
+                <a:ea typeface="Calibri" pitchFamily="34" charset="-122"/>
+                <a:cs typeface="Calibri" pitchFamily="34" charset="-120"/>
+              </a:rPr>
+              <a:t> Open Library</a:t>
+            </a:r>
+            <a:endParaRPr lang="en-US" sz="1300" i="1" dirty="0">
+              <a:solidFill>
+                <a:srgbClr val="B5D4F4"/>
+              </a:solidFill>
+              <a:latin typeface="Calibri" pitchFamily="34" charset="0"/>
+              <a:ea typeface="Calibri" pitchFamily="34" charset="-122"/>
+              <a:cs typeface="Calibri" pitchFamily="34" charset="-120"/>
+            </a:endParaRPr>
           </a:p>
         </p:txBody>
       </p:sp>
@@ -6429,21 +6554,168 @@
           <a:bodyPr wrap="square" lIns="0" tIns="0" rIns="0" bIns="0" rtlCol="0" anchor="ctr"/>
           <a:lstStyle/>
           <a:p>
-            <a:pPr marL="0" indent="0">
-              <a:buNone/>
-            </a:pPr>
-            <a:r>
-              <a:rPr lang="en-US" sz="1300" i="1" dirty="0">
-                <a:solidFill>
-                  <a:srgbClr val="B5D4F4"/>
-                </a:solidFill>
-                <a:latin typeface="Calibri" pitchFamily="34" charset="0"/>
-                <a:ea typeface="Calibri" pitchFamily="34" charset="-122"/>
-                <a:cs typeface="Calibri" pitchFamily="34" charset="-120"/>
-              </a:rPr>
-              <a:t>[ FEATURE 2 ]</a:t>
-            </a:r>
-            <a:endParaRPr lang="en-US" sz="1300" dirty="0"/>
+            <a:r>
+              <a:rPr lang="pt-BR" sz="1300" i="1" dirty="0">
+                <a:solidFill>
+                  <a:srgbClr val="B5D4F4"/>
+                </a:solidFill>
+                <a:latin typeface="Calibri" pitchFamily="34" charset="0"/>
+                <a:ea typeface="Calibri" pitchFamily="34" charset="-122"/>
+                <a:cs typeface="Calibri" pitchFamily="34" charset="-120"/>
+              </a:rPr>
+              <a:t>Discover </a:t>
+            </a:r>
+            <a:r>
+              <a:rPr lang="pt-BR" sz="1300" i="1" dirty="0" err="1">
+                <a:solidFill>
+                  <a:srgbClr val="B5D4F4"/>
+                </a:solidFill>
+                <a:latin typeface="Calibri" pitchFamily="34" charset="0"/>
+                <a:ea typeface="Calibri" pitchFamily="34" charset="-122"/>
+                <a:cs typeface="Calibri" pitchFamily="34" charset="-120"/>
+              </a:rPr>
+              <a:t>by</a:t>
+            </a:r>
+            <a:r>
+              <a:rPr lang="pt-BR" sz="1300" i="1" dirty="0">
+                <a:solidFill>
+                  <a:srgbClr val="B5D4F4"/>
+                </a:solidFill>
+                <a:latin typeface="Calibri" pitchFamily="34" charset="0"/>
+                <a:ea typeface="Calibri" pitchFamily="34" charset="-122"/>
+                <a:cs typeface="Calibri" pitchFamily="34" charset="-120"/>
+              </a:rPr>
+              <a:t> </a:t>
+            </a:r>
+            <a:r>
+              <a:rPr lang="pt-BR" sz="1300" i="1" dirty="0" err="1">
+                <a:solidFill>
+                  <a:srgbClr val="B5D4F4"/>
+                </a:solidFill>
+                <a:latin typeface="Calibri" pitchFamily="34" charset="0"/>
+                <a:ea typeface="Calibri" pitchFamily="34" charset="-122"/>
+                <a:cs typeface="Calibri" pitchFamily="34" charset="-120"/>
+              </a:rPr>
+              <a:t>Genre</a:t>
+            </a:r>
+            <a:r>
+              <a:rPr lang="pt-BR" sz="1300" i="1" dirty="0">
+                <a:solidFill>
+                  <a:srgbClr val="B5D4F4"/>
+                </a:solidFill>
+                <a:latin typeface="Calibri" pitchFamily="34" charset="0"/>
+                <a:ea typeface="Calibri" pitchFamily="34" charset="-122"/>
+                <a:cs typeface="Calibri" pitchFamily="34" charset="-120"/>
+              </a:rPr>
+              <a:t>: </a:t>
+            </a:r>
+            <a:r>
+              <a:rPr lang="pt-BR" sz="1300" i="1" dirty="0" err="1">
+                <a:solidFill>
+                  <a:srgbClr val="B5D4F4"/>
+                </a:solidFill>
+                <a:latin typeface="Calibri" pitchFamily="34" charset="0"/>
+                <a:ea typeface="Calibri" pitchFamily="34" charset="-122"/>
+                <a:cs typeface="Calibri" pitchFamily="34" charset="-120"/>
+              </a:rPr>
+              <a:t>random</a:t>
+            </a:r>
+            <a:r>
+              <a:rPr lang="pt-BR" sz="1300" i="1" dirty="0">
+                <a:solidFill>
+                  <a:srgbClr val="B5D4F4"/>
+                </a:solidFill>
+                <a:latin typeface="Calibri" pitchFamily="34" charset="0"/>
+                <a:ea typeface="Calibri" pitchFamily="34" charset="-122"/>
+                <a:cs typeface="Calibri" pitchFamily="34" charset="-120"/>
+              </a:rPr>
+              <a:t> book </a:t>
+            </a:r>
+            <a:r>
+              <a:rPr lang="pt-BR" sz="1300" i="1" dirty="0" err="1">
+                <a:solidFill>
+                  <a:srgbClr val="B5D4F4"/>
+                </a:solidFill>
+                <a:latin typeface="Calibri" pitchFamily="34" charset="0"/>
+                <a:ea typeface="Calibri" pitchFamily="34" charset="-122"/>
+                <a:cs typeface="Calibri" pitchFamily="34" charset="-120"/>
+              </a:rPr>
+              <a:t>picker</a:t>
+            </a:r>
+            <a:r>
+              <a:rPr lang="pt-BR" sz="1300" i="1" dirty="0">
+                <a:solidFill>
+                  <a:srgbClr val="B5D4F4"/>
+                </a:solidFill>
+                <a:latin typeface="Calibri" pitchFamily="34" charset="0"/>
+                <a:ea typeface="Calibri" pitchFamily="34" charset="-122"/>
+                <a:cs typeface="Calibri" pitchFamily="34" charset="-120"/>
+              </a:rPr>
+              <a:t> </a:t>
+            </a:r>
+            <a:r>
+              <a:rPr lang="pt-BR" sz="1300" i="1" dirty="0" err="1">
+                <a:solidFill>
+                  <a:srgbClr val="B5D4F4"/>
+                </a:solidFill>
+                <a:latin typeface="Calibri" pitchFamily="34" charset="0"/>
+                <a:ea typeface="Calibri" pitchFamily="34" charset="-122"/>
+                <a:cs typeface="Calibri" pitchFamily="34" charset="-120"/>
+              </a:rPr>
+              <a:t>filtered</a:t>
+            </a:r>
+            <a:r>
+              <a:rPr lang="pt-BR" sz="1300" i="1" dirty="0">
+                <a:solidFill>
+                  <a:srgbClr val="B5D4F4"/>
+                </a:solidFill>
+                <a:latin typeface="Calibri" pitchFamily="34" charset="0"/>
+                <a:ea typeface="Calibri" pitchFamily="34" charset="-122"/>
+                <a:cs typeface="Calibri" pitchFamily="34" charset="-120"/>
+              </a:rPr>
+              <a:t> </a:t>
+            </a:r>
+            <a:r>
+              <a:rPr lang="pt-BR" sz="1300" i="1" dirty="0" err="1">
+                <a:solidFill>
+                  <a:srgbClr val="B5D4F4"/>
+                </a:solidFill>
+                <a:latin typeface="Calibri" pitchFamily="34" charset="0"/>
+                <a:ea typeface="Calibri" pitchFamily="34" charset="-122"/>
+                <a:cs typeface="Calibri" pitchFamily="34" charset="-120"/>
+              </a:rPr>
+              <a:t>by</a:t>
+            </a:r>
+            <a:r>
+              <a:rPr lang="pt-BR" sz="1300" i="1" dirty="0">
+                <a:solidFill>
+                  <a:srgbClr val="B5D4F4"/>
+                </a:solidFill>
+                <a:latin typeface="Calibri" pitchFamily="34" charset="0"/>
+                <a:ea typeface="Calibri" pitchFamily="34" charset="-122"/>
+                <a:cs typeface="Calibri" pitchFamily="34" charset="-120"/>
+              </a:rPr>
+              <a:t> </a:t>
+            </a:r>
+            <a:r>
+              <a:rPr lang="pt-BR" sz="1300" i="1" dirty="0" err="1">
+                <a:solidFill>
+                  <a:srgbClr val="B5D4F4"/>
+                </a:solidFill>
+                <a:latin typeface="Calibri" pitchFamily="34" charset="0"/>
+                <a:ea typeface="Calibri" pitchFamily="34" charset="-122"/>
+                <a:cs typeface="Calibri" pitchFamily="34" charset="-120"/>
+              </a:rPr>
+              <a:t>genre</a:t>
+            </a:r>
+            <a:endParaRPr lang="en-US" sz="1300" i="1" dirty="0">
+              <a:solidFill>
+                <a:srgbClr val="B5D4F4"/>
+              </a:solidFill>
+              <a:latin typeface="Calibri" pitchFamily="34" charset="0"/>
+              <a:ea typeface="Calibri" pitchFamily="34" charset="-122"/>
+              <a:cs typeface="Calibri" pitchFamily="34" charset="-120"/>
+            </a:endParaRPr>
           </a:p>
         </p:txBody>
       </p:sp>
@@ -6468,21 +6740,179 @@
           <a:bodyPr wrap="square" lIns="0" tIns="0" rIns="0" bIns="0" rtlCol="0" anchor="ctr"/>
           <a:lstStyle/>
           <a:p>
-            <a:pPr marL="0" indent="0">
-              <a:buNone/>
-            </a:pPr>
-            <a:r>
-              <a:rPr lang="en-US" sz="1300" i="1" dirty="0">
-                <a:solidFill>
-                  <a:srgbClr val="B5D4F4"/>
-                </a:solidFill>
-                <a:latin typeface="Calibri" pitchFamily="34" charset="0"/>
-                <a:ea typeface="Calibri" pitchFamily="34" charset="-122"/>
-                <a:cs typeface="Calibri" pitchFamily="34" charset="-120"/>
-              </a:rPr>
-              <a:t>[ FEATURE 3 ]</a:t>
-            </a:r>
-            <a:endParaRPr lang="en-US" sz="1300" dirty="0"/>
+            <a:r>
+              <a:rPr lang="pt-BR" sz="1300" i="1" dirty="0" err="1">
+                <a:solidFill>
+                  <a:srgbClr val="B5D4F4"/>
+                </a:solidFill>
+                <a:latin typeface="Calibri" pitchFamily="34" charset="0"/>
+                <a:ea typeface="Calibri" pitchFamily="34" charset="-122"/>
+                <a:cs typeface="Calibri" pitchFamily="34" charset="-120"/>
+              </a:rPr>
+              <a:t>Adjustable</a:t>
+            </a:r>
+            <a:r>
+              <a:rPr lang="pt-BR" sz="1300" i="1" dirty="0">
+                <a:solidFill>
+                  <a:srgbClr val="B5D4F4"/>
+                </a:solidFill>
+                <a:latin typeface="Calibri" pitchFamily="34" charset="0"/>
+                <a:ea typeface="Calibri" pitchFamily="34" charset="-122"/>
+                <a:cs typeface="Calibri" pitchFamily="34" charset="-120"/>
+              </a:rPr>
+              <a:t> </a:t>
+            </a:r>
+            <a:r>
+              <a:rPr lang="pt-BR" sz="1300" i="1" dirty="0" err="1">
+                <a:solidFill>
+                  <a:srgbClr val="B5D4F4"/>
+                </a:solidFill>
+                <a:latin typeface="Calibri" pitchFamily="34" charset="0"/>
+                <a:ea typeface="Calibri" pitchFamily="34" charset="-122"/>
+                <a:cs typeface="Calibri" pitchFamily="34" charset="-120"/>
+              </a:rPr>
+              <a:t>Results</a:t>
+            </a:r>
+            <a:r>
+              <a:rPr lang="pt-BR" sz="1300" i="1" dirty="0">
+                <a:solidFill>
+                  <a:srgbClr val="B5D4F4"/>
+                </a:solidFill>
+                <a:latin typeface="Calibri" pitchFamily="34" charset="0"/>
+                <a:ea typeface="Calibri" pitchFamily="34" charset="-122"/>
+                <a:cs typeface="Calibri" pitchFamily="34" charset="-120"/>
+              </a:rPr>
+              <a:t>: </a:t>
+            </a:r>
+            <a:r>
+              <a:rPr lang="pt-BR" sz="1300" i="1" dirty="0" err="1">
+                <a:solidFill>
+                  <a:srgbClr val="B5D4F4"/>
+                </a:solidFill>
+                <a:latin typeface="Calibri" pitchFamily="34" charset="0"/>
+                <a:ea typeface="Calibri" pitchFamily="34" charset="-122"/>
+                <a:cs typeface="Calibri" pitchFamily="34" charset="-120"/>
+              </a:rPr>
+              <a:t>slider</a:t>
+            </a:r>
+            <a:r>
+              <a:rPr lang="pt-BR" sz="1300" i="1" dirty="0">
+                <a:solidFill>
+                  <a:srgbClr val="B5D4F4"/>
+                </a:solidFill>
+                <a:latin typeface="Calibri" pitchFamily="34" charset="0"/>
+                <a:ea typeface="Calibri" pitchFamily="34" charset="-122"/>
+                <a:cs typeface="Calibri" pitchFamily="34" charset="-120"/>
+              </a:rPr>
+              <a:t> </a:t>
+            </a:r>
+            <a:r>
+              <a:rPr lang="pt-BR" sz="1300" i="1" dirty="0" err="1">
+                <a:solidFill>
+                  <a:srgbClr val="B5D4F4"/>
+                </a:solidFill>
+                <a:latin typeface="Calibri" pitchFamily="34" charset="0"/>
+                <a:ea typeface="Calibri" pitchFamily="34" charset="-122"/>
+                <a:cs typeface="Calibri" pitchFamily="34" charset="-120"/>
+              </a:rPr>
+              <a:t>to</a:t>
+            </a:r>
+            <a:r>
+              <a:rPr lang="pt-BR" sz="1300" i="1" dirty="0">
+                <a:solidFill>
+                  <a:srgbClr val="B5D4F4"/>
+                </a:solidFill>
+                <a:latin typeface="Calibri" pitchFamily="34" charset="0"/>
+                <a:ea typeface="Calibri" pitchFamily="34" charset="-122"/>
+                <a:cs typeface="Calibri" pitchFamily="34" charset="-120"/>
+              </a:rPr>
+              <a:t> </a:t>
+            </a:r>
+            <a:r>
+              <a:rPr lang="pt-BR" sz="1300" i="1" dirty="0" err="1">
+                <a:solidFill>
+                  <a:srgbClr val="B5D4F4"/>
+                </a:solidFill>
+                <a:latin typeface="Calibri" pitchFamily="34" charset="0"/>
+                <a:ea typeface="Calibri" pitchFamily="34" charset="-122"/>
+                <a:cs typeface="Calibri" pitchFamily="34" charset="-120"/>
+              </a:rPr>
+              <a:t>choose</a:t>
+            </a:r>
+            <a:r>
+              <a:rPr lang="pt-BR" sz="1300" i="1" dirty="0">
+                <a:solidFill>
+                  <a:srgbClr val="B5D4F4"/>
+                </a:solidFill>
+                <a:latin typeface="Calibri" pitchFamily="34" charset="0"/>
+                <a:ea typeface="Calibri" pitchFamily="34" charset="-122"/>
+                <a:cs typeface="Calibri" pitchFamily="34" charset="-120"/>
+              </a:rPr>
+              <a:t>  </a:t>
+            </a:r>
+            <a:r>
+              <a:rPr lang="pt-BR" sz="1300" i="1" dirty="0" err="1">
+                <a:solidFill>
+                  <a:srgbClr val="B5D4F4"/>
+                </a:solidFill>
+                <a:latin typeface="Calibri" pitchFamily="34" charset="0"/>
+                <a:ea typeface="Calibri" pitchFamily="34" charset="-122"/>
+                <a:cs typeface="Calibri" pitchFamily="34" charset="-120"/>
+              </a:rPr>
+              <a:t>from</a:t>
+            </a:r>
+            <a:r>
+              <a:rPr lang="pt-BR" sz="1300" i="1" dirty="0">
+                <a:solidFill>
+                  <a:srgbClr val="B5D4F4"/>
+                </a:solidFill>
+                <a:latin typeface="Calibri" pitchFamily="34" charset="0"/>
+                <a:ea typeface="Calibri" pitchFamily="34" charset="-122"/>
+                <a:cs typeface="Calibri" pitchFamily="34" charset="-120"/>
+              </a:rPr>
+              <a:t> 1 </a:t>
+            </a:r>
+            <a:r>
+              <a:rPr lang="pt-BR" sz="1300" i="1" dirty="0" err="1">
+                <a:solidFill>
+                  <a:srgbClr val="B5D4F4"/>
+                </a:solidFill>
+                <a:latin typeface="Calibri" pitchFamily="34" charset="0"/>
+                <a:ea typeface="Calibri" pitchFamily="34" charset="-122"/>
+                <a:cs typeface="Calibri" pitchFamily="34" charset="-120"/>
+              </a:rPr>
+              <a:t>to</a:t>
+            </a:r>
+            <a:r>
+              <a:rPr lang="pt-BR" sz="1300" i="1" dirty="0">
+                <a:solidFill>
+                  <a:srgbClr val="B5D4F4"/>
+                </a:solidFill>
+                <a:latin typeface="Calibri" pitchFamily="34" charset="0"/>
+                <a:ea typeface="Calibri" pitchFamily="34" charset="-122"/>
+                <a:cs typeface="Calibri" pitchFamily="34" charset="-120"/>
+              </a:rPr>
+              <a:t> 9 </a:t>
+            </a:r>
+            <a:r>
+              <a:rPr lang="pt-BR" sz="1300" i="1" dirty="0" err="1">
+                <a:solidFill>
+                  <a:srgbClr val="B5D4F4"/>
+                </a:solidFill>
+                <a:latin typeface="Calibri" pitchFamily="34" charset="0"/>
+                <a:ea typeface="Calibri" pitchFamily="34" charset="-122"/>
+                <a:cs typeface="Calibri" pitchFamily="34" charset="-120"/>
+              </a:rPr>
+              <a:t>recommendations</a:t>
+            </a:r>
+            <a:endParaRPr lang="en-US" sz="1300" i="1" dirty="0">
+              <a:solidFill>
+                <a:srgbClr val="B5D4F4"/>
+              </a:solidFill>
+              <a:latin typeface="Calibri" pitchFamily="34" charset="0"/>
+              <a:ea typeface="Calibri" pitchFamily="34" charset="-122"/>
+              <a:cs typeface="Calibri" pitchFamily="34" charset="-120"/>
+            </a:endParaRPr>
           </a:p>
         </p:txBody>
       </p:sp>
@@ -6507,21 +6937,190 @@
           <a:bodyPr wrap="square" lIns="0" tIns="0" rIns="0" bIns="0" rtlCol="0" anchor="ctr"/>
           <a:lstStyle/>
           <a:p>
-            <a:pPr marL="0" indent="0">
-              <a:buNone/>
-            </a:pPr>
-            <a:r>
-              <a:rPr lang="en-US" sz="1300" i="1" dirty="0">
-                <a:solidFill>
-                  <a:srgbClr val="B5D4F4"/>
-                </a:solidFill>
-                <a:latin typeface="Calibri" pitchFamily="34" charset="0"/>
-                <a:ea typeface="Calibri" pitchFamily="34" charset="-122"/>
-                <a:cs typeface="Calibri" pitchFamily="34" charset="-120"/>
-              </a:rPr>
-              <a:t>[ FEATURE 4 ]</a:t>
-            </a:r>
-            <a:endParaRPr lang="en-US" sz="1300" dirty="0"/>
+            <a:r>
+              <a:rPr lang="pt-BR" sz="1300" i="1" dirty="0">
+                <a:solidFill>
+                  <a:srgbClr val="B5D4F4"/>
+                </a:solidFill>
+                <a:latin typeface="Calibri" pitchFamily="34" charset="0"/>
+                <a:ea typeface="Calibri" pitchFamily="34" charset="-122"/>
+                <a:cs typeface="Calibri" pitchFamily="34" charset="-120"/>
+              </a:rPr>
+              <a:t>Book </a:t>
+            </a:r>
+            <a:r>
+              <a:rPr lang="pt-BR" sz="1300" i="1" dirty="0" err="1">
+                <a:solidFill>
+                  <a:srgbClr val="B5D4F4"/>
+                </a:solidFill>
+                <a:latin typeface="Calibri" pitchFamily="34" charset="0"/>
+                <a:ea typeface="Calibri" pitchFamily="34" charset="-122"/>
+                <a:cs typeface="Calibri" pitchFamily="34" charset="-120"/>
+              </a:rPr>
+              <a:t>Details</a:t>
+            </a:r>
+            <a:r>
+              <a:rPr lang="pt-BR" sz="1300" i="1" dirty="0">
+                <a:solidFill>
+                  <a:srgbClr val="B5D4F4"/>
+                </a:solidFill>
+                <a:latin typeface="Calibri" pitchFamily="34" charset="0"/>
+                <a:ea typeface="Calibri" pitchFamily="34" charset="-122"/>
+                <a:cs typeface="Calibri" pitchFamily="34" charset="-120"/>
+              </a:rPr>
+              <a:t>: cover </a:t>
+            </a:r>
+            <a:r>
+              <a:rPr lang="pt-BR" sz="1300" i="1" dirty="0" err="1">
+                <a:solidFill>
+                  <a:srgbClr val="B5D4F4"/>
+                </a:solidFill>
+                <a:latin typeface="Calibri" pitchFamily="34" charset="0"/>
+                <a:ea typeface="Calibri" pitchFamily="34" charset="-122"/>
+                <a:cs typeface="Calibri" pitchFamily="34" charset="-120"/>
+              </a:rPr>
+              <a:t>image</a:t>
+            </a:r>
+            <a:r>
+              <a:rPr lang="pt-BR" sz="1300" i="1" dirty="0">
+                <a:solidFill>
+                  <a:srgbClr val="B5D4F4"/>
+                </a:solidFill>
+                <a:latin typeface="Calibri" pitchFamily="34" charset="0"/>
+                <a:ea typeface="Calibri" pitchFamily="34" charset="-122"/>
+                <a:cs typeface="Calibri" pitchFamily="34" charset="-120"/>
+              </a:rPr>
+              <a:t>, rating, </a:t>
+            </a:r>
+            <a:r>
+              <a:rPr lang="pt-BR" sz="1300" i="1" dirty="0" err="1">
+                <a:solidFill>
+                  <a:srgbClr val="B5D4F4"/>
+                </a:solidFill>
+                <a:latin typeface="Calibri" pitchFamily="34" charset="0"/>
+                <a:ea typeface="Calibri" pitchFamily="34" charset="-122"/>
+                <a:cs typeface="Calibri" pitchFamily="34" charset="-120"/>
+              </a:rPr>
+              <a:t>year</a:t>
+            </a:r>
+            <a:r>
+              <a:rPr lang="pt-BR" sz="1300" i="1" dirty="0">
+                <a:solidFill>
+                  <a:srgbClr val="B5D4F4"/>
+                </a:solidFill>
+                <a:latin typeface="Calibri" pitchFamily="34" charset="0"/>
+                <a:ea typeface="Calibri" pitchFamily="34" charset="-122"/>
+                <a:cs typeface="Calibri" pitchFamily="34" charset="-120"/>
+              </a:rPr>
+              <a:t> </a:t>
+            </a:r>
+            <a:r>
+              <a:rPr lang="pt-BR" sz="1300" i="1" dirty="0" err="1">
+                <a:solidFill>
+                  <a:srgbClr val="B5D4F4"/>
+                </a:solidFill>
+                <a:latin typeface="Calibri" pitchFamily="34" charset="0"/>
+                <a:ea typeface="Calibri" pitchFamily="34" charset="-122"/>
+                <a:cs typeface="Calibri" pitchFamily="34" charset="-120"/>
+              </a:rPr>
+              <a:t>published</a:t>
+            </a:r>
+            <a:r>
+              <a:rPr lang="pt-BR" sz="1300" i="1" dirty="0">
+                <a:solidFill>
+                  <a:srgbClr val="B5D4F4"/>
+                </a:solidFill>
+                <a:latin typeface="Calibri" pitchFamily="34" charset="0"/>
+                <a:ea typeface="Calibri" pitchFamily="34" charset="-122"/>
+                <a:cs typeface="Calibri" pitchFamily="34" charset="-120"/>
+              </a:rPr>
+              <a:t>, </a:t>
+            </a:r>
+            <a:r>
+              <a:rPr lang="pt-BR" sz="1300" i="1" dirty="0" err="1">
+                <a:solidFill>
+                  <a:srgbClr val="B5D4F4"/>
+                </a:solidFill>
+                <a:latin typeface="Calibri" pitchFamily="34" charset="0"/>
+                <a:ea typeface="Calibri" pitchFamily="34" charset="-122"/>
+                <a:cs typeface="Calibri" pitchFamily="34" charset="-120"/>
+              </a:rPr>
+              <a:t>genres</a:t>
+            </a:r>
+            <a:r>
+              <a:rPr lang="pt-BR" sz="1300" i="1" dirty="0">
+                <a:solidFill>
+                  <a:srgbClr val="B5D4F4"/>
+                </a:solidFill>
+                <a:latin typeface="Calibri" pitchFamily="34" charset="0"/>
+                <a:ea typeface="Calibri" pitchFamily="34" charset="-122"/>
+                <a:cs typeface="Calibri" pitchFamily="34" charset="-120"/>
+              </a:rPr>
+              <a:t> </a:t>
+            </a:r>
+            <a:r>
+              <a:rPr lang="pt-BR" sz="1300" i="1" dirty="0" err="1">
+                <a:solidFill>
+                  <a:srgbClr val="B5D4F4"/>
+                </a:solidFill>
+                <a:latin typeface="Calibri" pitchFamily="34" charset="0"/>
+                <a:ea typeface="Calibri" pitchFamily="34" charset="-122"/>
+                <a:cs typeface="Calibri" pitchFamily="34" charset="-120"/>
+              </a:rPr>
+              <a:t>and</a:t>
+            </a:r>
+            <a:r>
+              <a:rPr lang="pt-BR" sz="1300" i="1" dirty="0">
+                <a:solidFill>
+                  <a:srgbClr val="B5D4F4"/>
+                </a:solidFill>
+                <a:latin typeface="Calibri" pitchFamily="34" charset="0"/>
+                <a:ea typeface="Calibri" pitchFamily="34" charset="-122"/>
+                <a:cs typeface="Calibri" pitchFamily="34" charset="-120"/>
+              </a:rPr>
+              <a:t> </a:t>
+            </a:r>
+            <a:r>
+              <a:rPr lang="pt-BR" sz="1300" i="1" dirty="0" err="1">
+                <a:solidFill>
+                  <a:srgbClr val="B5D4F4"/>
+                </a:solidFill>
+                <a:latin typeface="Calibri" pitchFamily="34" charset="0"/>
+                <a:ea typeface="Calibri" pitchFamily="34" charset="-122"/>
+                <a:cs typeface="Calibri" pitchFamily="34" charset="-120"/>
+              </a:rPr>
+              <a:t>expandable</a:t>
+            </a:r>
+            <a:r>
+              <a:rPr lang="pt-BR" sz="1300" i="1" dirty="0">
+                <a:solidFill>
+                  <a:srgbClr val="B5D4F4"/>
+                </a:solidFill>
+                <a:latin typeface="Calibri" pitchFamily="34" charset="0"/>
+                <a:ea typeface="Calibri" pitchFamily="34" charset="-122"/>
+                <a:cs typeface="Calibri" pitchFamily="34" charset="-120"/>
+              </a:rPr>
+              <a:t> </a:t>
+            </a:r>
+            <a:r>
+              <a:rPr lang="pt-BR" sz="1300" i="1" dirty="0" err="1">
+                <a:solidFill>
+                  <a:srgbClr val="B5D4F4"/>
+                </a:solidFill>
+                <a:latin typeface="Calibri" pitchFamily="34" charset="0"/>
+                <a:ea typeface="Calibri" pitchFamily="34" charset="-122"/>
+                <a:cs typeface="Calibri" pitchFamily="34" charset="-120"/>
+              </a:rPr>
+              <a:t>description</a:t>
+            </a:r>
+            <a:endParaRPr lang="en-US" sz="1300" i="1" dirty="0">
+              <a:solidFill>
+                <a:srgbClr val="B5D4F4"/>
+              </a:solidFill>
+              <a:latin typeface="Calibri" pitchFamily="34" charset="0"/>
+              <a:ea typeface="Calibri" pitchFamily="34" charset="-122"/>
+              <a:cs typeface="Calibri" pitchFamily="34" charset="-120"/>
+            </a:endParaRPr>
           </a:p>
         </p:txBody>
       </p:sp>
@@ -6546,21 +7145,179 @@
           <a:bodyPr wrap="square" lIns="0" tIns="0" rIns="0" bIns="0" rtlCol="0" anchor="ctr"/>
           <a:lstStyle/>
           <a:p>
-            <a:pPr marL="0" indent="0">
-              <a:buNone/>
-            </a:pPr>
-            <a:r>
-              <a:rPr lang="en-US" sz="1300" i="1" dirty="0">
-                <a:solidFill>
-                  <a:srgbClr val="B5D4F4"/>
-                </a:solidFill>
-                <a:latin typeface="Calibri" pitchFamily="34" charset="0"/>
-                <a:ea typeface="Calibri" pitchFamily="34" charset="-122"/>
-                <a:cs typeface="Calibri" pitchFamily="34" charset="-120"/>
-              </a:rPr>
-              <a:t>[ FEATURE 5 ]</a:t>
-            </a:r>
-            <a:endParaRPr lang="en-US" sz="1300" dirty="0"/>
+            <a:r>
+              <a:rPr lang="pt-BR" sz="1300" i="1" dirty="0">
+                <a:solidFill>
+                  <a:srgbClr val="B5D4F4"/>
+                </a:solidFill>
+                <a:latin typeface="Calibri" pitchFamily="34" charset="0"/>
+                <a:ea typeface="Calibri" pitchFamily="34" charset="-122"/>
+                <a:cs typeface="Calibri" pitchFamily="34" charset="-120"/>
+              </a:rPr>
+              <a:t>Direct Links: </a:t>
+            </a:r>
+            <a:r>
+              <a:rPr lang="pt-BR" sz="1300" i="1" dirty="0" err="1">
+                <a:solidFill>
+                  <a:srgbClr val="B5D4F4"/>
+                </a:solidFill>
+                <a:latin typeface="Calibri" pitchFamily="34" charset="0"/>
+                <a:ea typeface="Calibri" pitchFamily="34" charset="-122"/>
+                <a:cs typeface="Calibri" pitchFamily="34" charset="-120"/>
+              </a:rPr>
+              <a:t>one</a:t>
+            </a:r>
+            <a:r>
+              <a:rPr lang="pt-BR" sz="1300" i="1" dirty="0">
+                <a:solidFill>
+                  <a:srgbClr val="B5D4F4"/>
+                </a:solidFill>
+                <a:latin typeface="Calibri" pitchFamily="34" charset="0"/>
+                <a:ea typeface="Calibri" pitchFamily="34" charset="-122"/>
+                <a:cs typeface="Calibri" pitchFamily="34" charset="-120"/>
+              </a:rPr>
+              <a:t> click </a:t>
+            </a:r>
+            <a:r>
+              <a:rPr lang="pt-BR" sz="1300" i="1" dirty="0" err="1">
+                <a:solidFill>
+                  <a:srgbClr val="B5D4F4"/>
+                </a:solidFill>
+                <a:latin typeface="Calibri" pitchFamily="34" charset="0"/>
+                <a:ea typeface="Calibri" pitchFamily="34" charset="-122"/>
+                <a:cs typeface="Calibri" pitchFamily="34" charset="-120"/>
+              </a:rPr>
+              <a:t>to</a:t>
+            </a:r>
+            <a:r>
+              <a:rPr lang="pt-BR" sz="1300" i="1" dirty="0">
+                <a:solidFill>
+                  <a:srgbClr val="B5D4F4"/>
+                </a:solidFill>
+                <a:latin typeface="Calibri" pitchFamily="34" charset="0"/>
+                <a:ea typeface="Calibri" pitchFamily="34" charset="-122"/>
+                <a:cs typeface="Calibri" pitchFamily="34" charset="-120"/>
+              </a:rPr>
+              <a:t> </a:t>
+            </a:r>
+            <a:r>
+              <a:rPr lang="pt-BR" sz="1300" i="1" dirty="0" err="1">
+                <a:solidFill>
+                  <a:srgbClr val="B5D4F4"/>
+                </a:solidFill>
+                <a:latin typeface="Calibri" pitchFamily="34" charset="0"/>
+                <a:ea typeface="Calibri" pitchFamily="34" charset="-122"/>
+                <a:cs typeface="Calibri" pitchFamily="34" charset="-120"/>
+              </a:rPr>
+              <a:t>view</a:t>
+            </a:r>
+            <a:r>
+              <a:rPr lang="pt-BR" sz="1300" i="1" dirty="0">
+                <a:solidFill>
+                  <a:srgbClr val="B5D4F4"/>
+                </a:solidFill>
+                <a:latin typeface="Calibri" pitchFamily="34" charset="0"/>
+                <a:ea typeface="Calibri" pitchFamily="34" charset="-122"/>
+                <a:cs typeface="Calibri" pitchFamily="34" charset="-120"/>
+              </a:rPr>
+              <a:t> </a:t>
+            </a:r>
+            <a:r>
+              <a:rPr lang="pt-BR" sz="1300" i="1" dirty="0" err="1">
+                <a:solidFill>
+                  <a:srgbClr val="B5D4F4"/>
+                </a:solidFill>
+                <a:latin typeface="Calibri" pitchFamily="34" charset="0"/>
+                <a:ea typeface="Calibri" pitchFamily="34" charset="-122"/>
+                <a:cs typeface="Calibri" pitchFamily="34" charset="-120"/>
+              </a:rPr>
+              <a:t>any</a:t>
+            </a:r>
+            <a:r>
+              <a:rPr lang="pt-BR" sz="1300" i="1" dirty="0">
+                <a:solidFill>
+                  <a:srgbClr val="B5D4F4"/>
+                </a:solidFill>
+                <a:latin typeface="Calibri" pitchFamily="34" charset="0"/>
+                <a:ea typeface="Calibri" pitchFamily="34" charset="-122"/>
+                <a:cs typeface="Calibri" pitchFamily="34" charset="-120"/>
+              </a:rPr>
+              <a:t> book </a:t>
+            </a:r>
+            <a:r>
+              <a:rPr lang="pt-BR" sz="1300" i="1" dirty="0" err="1">
+                <a:solidFill>
+                  <a:srgbClr val="B5D4F4"/>
+                </a:solidFill>
+                <a:latin typeface="Calibri" pitchFamily="34" charset="0"/>
+                <a:ea typeface="Calibri" pitchFamily="34" charset="-122"/>
+                <a:cs typeface="Calibri" pitchFamily="34" charset="-120"/>
+              </a:rPr>
+              <a:t>on</a:t>
+            </a:r>
+            <a:r>
+              <a:rPr lang="pt-BR" sz="1300" i="1" dirty="0">
+                <a:solidFill>
+                  <a:srgbClr val="B5D4F4"/>
+                </a:solidFill>
+                <a:latin typeface="Calibri" pitchFamily="34" charset="0"/>
+                <a:ea typeface="Calibri" pitchFamily="34" charset="-122"/>
+                <a:cs typeface="Calibri" pitchFamily="34" charset="-120"/>
+              </a:rPr>
+              <a:t> </a:t>
+            </a:r>
+            <a:r>
+              <a:rPr lang="pt-BR" sz="1300" i="1" dirty="0" err="1">
+                <a:solidFill>
+                  <a:srgbClr val="B5D4F4"/>
+                </a:solidFill>
+                <a:latin typeface="Calibri" pitchFamily="34" charset="0"/>
+                <a:ea typeface="Calibri" pitchFamily="34" charset="-122"/>
+                <a:cs typeface="Calibri" pitchFamily="34" charset="-120"/>
+              </a:rPr>
+              <a:t>GoodReads</a:t>
+            </a:r>
+            <a:r>
+              <a:rPr lang="pt-BR" sz="1300" i="1" dirty="0">
+                <a:solidFill>
+                  <a:srgbClr val="B5D4F4"/>
+                </a:solidFill>
+                <a:latin typeface="Calibri" pitchFamily="34" charset="0"/>
+                <a:ea typeface="Calibri" pitchFamily="34" charset="-122"/>
+                <a:cs typeface="Calibri" pitchFamily="34" charset="-120"/>
+              </a:rPr>
+              <a:t> </a:t>
+            </a:r>
+            <a:r>
+              <a:rPr lang="pt-BR" sz="1300" i="1" dirty="0" err="1">
+                <a:solidFill>
+                  <a:srgbClr val="B5D4F4"/>
+                </a:solidFill>
+                <a:latin typeface="Calibri" pitchFamily="34" charset="0"/>
+                <a:ea typeface="Calibri" pitchFamily="34" charset="-122"/>
+                <a:cs typeface="Calibri" pitchFamily="34" charset="-120"/>
+              </a:rPr>
+              <a:t>or</a:t>
+            </a:r>
+            <a:r>
+              <a:rPr lang="pt-BR" sz="1300" i="1" dirty="0">
+                <a:solidFill>
+                  <a:srgbClr val="B5D4F4"/>
+                </a:solidFill>
+                <a:latin typeface="Calibri" pitchFamily="34" charset="0"/>
+                <a:ea typeface="Calibri" pitchFamily="34" charset="-122"/>
+                <a:cs typeface="Calibri" pitchFamily="34" charset="-120"/>
+              </a:rPr>
+              <a:t> Google Books</a:t>
+            </a:r>
+            <a:endParaRPr lang="en-US" sz="1300" i="1" dirty="0">
+              <a:solidFill>
+                <a:srgbClr val="B5D4F4"/>
+              </a:solidFill>
+              <a:latin typeface="Calibri" pitchFamily="34" charset="0"/>
+              <a:ea typeface="Calibri" pitchFamily="34" charset="-122"/>
+              <a:cs typeface="Calibri" pitchFamily="34" charset="-120"/>
+            </a:endParaRPr>
           </a:p>
         </p:txBody>
       </p:sp>

--- a/the_reading_room_presentation.pptx
+++ b/the_reading_room_presentation.pptx
@@ -6268,7 +6268,9 @@
       </p:sp>
       <p:sp>
         <p:nvSpPr>
-          <p:cNvPr id="6" name="Shape 4"/>
+          <p:cNvPr id="6" name="Shape 4">
+            <a:hlinkClick r:id="rId3"/>
+          </p:cNvPr>
           <p:cNvSpPr/>
           <p:nvPr/>
         </p:nvSpPr>
@@ -6324,7 +6326,7 @@
                 <a:ea typeface="Calibri" pitchFamily="34" charset="-122"/>
                 <a:cs typeface="Calibri" pitchFamily="34" charset="-120"/>
               </a:rPr>
-              <a:t>[ INSERT DEPLOYED APP URL HERE ]</a:t>
+              <a:t>The Reading Room</a:t>
             </a:r>
             <a:endParaRPr lang="en-US" sz="1200" dirty="0"/>
           </a:p>
@@ -7321,6 +7323,36 @@
           </a:p>
         </p:txBody>
       </p:sp>
+      <p:pic>
+        <p:nvPicPr>
+          <p:cNvPr id="15" name="Imagem 14">
+            <a:extLst>
+              <a:ext uri="{FF2B5EF4-FFF2-40B4-BE49-F238E27FC236}">
+                <a16:creationId xmlns:a16="http://schemas.microsoft.com/office/drawing/2014/main" id="{A8EB3C97-741E-179E-FCC1-267FB9704CBD}"/>
+              </a:ext>
+            </a:extLst>
+          </p:cNvPr>
+          <p:cNvPicPr>
+            <a:picLocks noChangeAspect="1"/>
+          </p:cNvPicPr>
+          <p:nvPr/>
+        </p:nvPicPr>
+        <p:blipFill>
+          <a:blip r:embed="rId4"/>
+          <a:stretch>
+            <a:fillRect/>
+          </a:stretch>
+        </p:blipFill>
+        <p:spPr>
+          <a:xfrm>
+            <a:off x="457200" y="1367834"/>
+            <a:ext cx="5029200" cy="2448979"/>
+          </a:xfrm>
+          <a:prstGeom prst="rect">
+            <a:avLst/>
+          </a:prstGeom>
+        </p:spPr>
+      </p:pic>
     </p:spTree>
   </p:cSld>
   <p:clrMapOvr>
